--- a/host/velociraptor/activity1/Velociraptor.pptx
+++ b/host/velociraptor/activity1/Velociraptor.pptx
@@ -4,6 +4,9 @@
   <p:sldMasterIdLst>
     <p:sldMasterId id="2147483648" r:id="rId1"/>
   </p:sldMasterIdLst>
+  <p:notesMasterIdLst>
+    <p:notesMasterId r:id="rId13"/>
+  </p:notesMasterIdLst>
   <p:sldIdLst>
     <p:sldId id="256" r:id="rId2"/>
     <p:sldId id="258" r:id="rId3"/>
@@ -12,11 +15,10 @@
     <p:sldId id="266" r:id="rId6"/>
     <p:sldId id="261" r:id="rId7"/>
     <p:sldId id="268" r:id="rId8"/>
-    <p:sldId id="260" r:id="rId9"/>
-    <p:sldId id="263" r:id="rId10"/>
-    <p:sldId id="264" r:id="rId11"/>
-    <p:sldId id="265" r:id="rId12"/>
-    <p:sldId id="267" r:id="rId13"/>
+    <p:sldId id="263" r:id="rId9"/>
+    <p:sldId id="264" r:id="rId10"/>
+    <p:sldId id="265" r:id="rId11"/>
+    <p:sldId id="267" r:id="rId12"/>
   </p:sldIdLst>
   <p:sldSz cx="12192000" cy="6858000"/>
   <p:notesSz cx="6858000" cy="9144000"/>
@@ -123,6 +125,1239 @@
 </p:presentation>
 </file>
 
+<file path=ppt/notesMasters/notesMaster1.xml><?xml version="1.0" encoding="utf-8"?>
+<p:notesMaster xmlns:a="http://schemas.openxmlformats.org/drawingml/2006/main" xmlns:r="http://schemas.openxmlformats.org/officeDocument/2006/relationships" xmlns:p="http://schemas.openxmlformats.org/presentationml/2006/main">
+  <p:cSld>
+    <p:bg>
+      <p:bgRef idx="1001">
+        <a:schemeClr val="bg1"/>
+      </p:bgRef>
+    </p:bg>
+    <p:spTree>
+      <p:nvGrpSpPr>
+        <p:cNvPr id="1" name=""/>
+        <p:cNvGrpSpPr/>
+        <p:nvPr/>
+      </p:nvGrpSpPr>
+      <p:grpSpPr>
+        <a:xfrm>
+          <a:off x="0" y="0"/>
+          <a:ext cx="0" cy="0"/>
+          <a:chOff x="0" y="0"/>
+          <a:chExt cx="0" cy="0"/>
+        </a:xfrm>
+      </p:grpSpPr>
+      <p:sp>
+        <p:nvSpPr>
+          <p:cNvPr id="2" name="Header Placeholder 1"/>
+          <p:cNvSpPr>
+            <a:spLocks noGrp="1"/>
+          </p:cNvSpPr>
+          <p:nvPr>
+            <p:ph type="hdr" sz="quarter"/>
+          </p:nvPr>
+        </p:nvSpPr>
+        <p:spPr>
+          <a:xfrm>
+            <a:off x="0" y="0"/>
+            <a:ext cx="2971800" cy="458788"/>
+          </a:xfrm>
+          <a:prstGeom prst="rect">
+            <a:avLst/>
+          </a:prstGeom>
+        </p:spPr>
+        <p:txBody>
+          <a:bodyPr vert="horz" lIns="91440" tIns="45720" rIns="91440" bIns="45720" rtlCol="0"/>
+          <a:lstStyle>
+            <a:lvl1pPr algn="l">
+              <a:defRPr sz="1200"/>
+            </a:lvl1pPr>
+          </a:lstStyle>
+          <a:p>
+            <a:endParaRPr lang="en-AU"/>
+          </a:p>
+        </p:txBody>
+      </p:sp>
+      <p:sp>
+        <p:nvSpPr>
+          <p:cNvPr id="3" name="Date Placeholder 2"/>
+          <p:cNvSpPr>
+            <a:spLocks noGrp="1"/>
+          </p:cNvSpPr>
+          <p:nvPr>
+            <p:ph type="dt" idx="1"/>
+          </p:nvPr>
+        </p:nvSpPr>
+        <p:spPr>
+          <a:xfrm>
+            <a:off x="3884613" y="0"/>
+            <a:ext cx="2971800" cy="458788"/>
+          </a:xfrm>
+          <a:prstGeom prst="rect">
+            <a:avLst/>
+          </a:prstGeom>
+        </p:spPr>
+        <p:txBody>
+          <a:bodyPr vert="horz" lIns="91440" tIns="45720" rIns="91440" bIns="45720" rtlCol="0"/>
+          <a:lstStyle>
+            <a:lvl1pPr algn="r">
+              <a:defRPr sz="1200"/>
+            </a:lvl1pPr>
+          </a:lstStyle>
+          <a:p>
+            <a:fld id="{6A98BC15-E77D-49C8-91B1-83C88AB98CE9}" type="datetimeFigureOut">
+              <a:rPr lang="en-AU" smtClean="0"/>
+              <a:t>14/04/2026</a:t>
+            </a:fld>
+            <a:endParaRPr lang="en-AU"/>
+          </a:p>
+        </p:txBody>
+      </p:sp>
+      <p:sp>
+        <p:nvSpPr>
+          <p:cNvPr id="4" name="Slide Image Placeholder 3"/>
+          <p:cNvSpPr>
+            <a:spLocks noGrp="1" noRot="1" noChangeAspect="1"/>
+          </p:cNvSpPr>
+          <p:nvPr>
+            <p:ph type="sldImg" idx="2"/>
+          </p:nvPr>
+        </p:nvSpPr>
+        <p:spPr>
+          <a:xfrm>
+            <a:off x="685800" y="1143000"/>
+            <a:ext cx="5486400" cy="3086100"/>
+          </a:xfrm>
+          <a:prstGeom prst="rect">
+            <a:avLst/>
+          </a:prstGeom>
+          <a:noFill/>
+          <a:ln w="12700">
+            <a:solidFill>
+              <a:prstClr val="black"/>
+            </a:solidFill>
+          </a:ln>
+        </p:spPr>
+        <p:txBody>
+          <a:bodyPr vert="horz" lIns="91440" tIns="45720" rIns="91440" bIns="45720" rtlCol="0" anchor="ctr"/>
+          <a:lstStyle/>
+          <a:p>
+            <a:endParaRPr lang="en-AU"/>
+          </a:p>
+        </p:txBody>
+      </p:sp>
+      <p:sp>
+        <p:nvSpPr>
+          <p:cNvPr id="5" name="Notes Placeholder 4"/>
+          <p:cNvSpPr>
+            <a:spLocks noGrp="1"/>
+          </p:cNvSpPr>
+          <p:nvPr>
+            <p:ph type="body" sz="quarter" idx="3"/>
+          </p:nvPr>
+        </p:nvSpPr>
+        <p:spPr>
+          <a:xfrm>
+            <a:off x="685800" y="4400550"/>
+            <a:ext cx="5486400" cy="3600450"/>
+          </a:xfrm>
+          <a:prstGeom prst="rect">
+            <a:avLst/>
+          </a:prstGeom>
+        </p:spPr>
+        <p:txBody>
+          <a:bodyPr vert="horz" lIns="91440" tIns="45720" rIns="91440" bIns="45720" rtlCol="0"/>
+          <a:lstStyle/>
+          <a:p>
+            <a:pPr lvl="0"/>
+            <a:r>
+              <a:rPr lang="en-US"/>
+              <a:t>Click to edit Master text styles</a:t>
+            </a:r>
+          </a:p>
+          <a:p>
+            <a:pPr lvl="1"/>
+            <a:r>
+              <a:rPr lang="en-US"/>
+              <a:t>Second level</a:t>
+            </a:r>
+          </a:p>
+          <a:p>
+            <a:pPr lvl="2"/>
+            <a:r>
+              <a:rPr lang="en-US"/>
+              <a:t>Third level</a:t>
+            </a:r>
+          </a:p>
+          <a:p>
+            <a:pPr lvl="3"/>
+            <a:r>
+              <a:rPr lang="en-US"/>
+              <a:t>Fourth level</a:t>
+            </a:r>
+          </a:p>
+          <a:p>
+            <a:pPr lvl="4"/>
+            <a:r>
+              <a:rPr lang="en-US"/>
+              <a:t>Fifth level</a:t>
+            </a:r>
+            <a:endParaRPr lang="en-AU"/>
+          </a:p>
+        </p:txBody>
+      </p:sp>
+      <p:sp>
+        <p:nvSpPr>
+          <p:cNvPr id="6" name="Footer Placeholder 5"/>
+          <p:cNvSpPr>
+            <a:spLocks noGrp="1"/>
+          </p:cNvSpPr>
+          <p:nvPr>
+            <p:ph type="ftr" sz="quarter" idx="4"/>
+          </p:nvPr>
+        </p:nvSpPr>
+        <p:spPr>
+          <a:xfrm>
+            <a:off x="0" y="8685213"/>
+            <a:ext cx="2971800" cy="458787"/>
+          </a:xfrm>
+          <a:prstGeom prst="rect">
+            <a:avLst/>
+          </a:prstGeom>
+        </p:spPr>
+        <p:txBody>
+          <a:bodyPr vert="horz" lIns="91440" tIns="45720" rIns="91440" bIns="45720" rtlCol="0" anchor="b"/>
+          <a:lstStyle>
+            <a:lvl1pPr algn="l">
+              <a:defRPr sz="1200"/>
+            </a:lvl1pPr>
+          </a:lstStyle>
+          <a:p>
+            <a:endParaRPr lang="en-AU"/>
+          </a:p>
+        </p:txBody>
+      </p:sp>
+      <p:sp>
+        <p:nvSpPr>
+          <p:cNvPr id="7" name="Slide Number Placeholder 6"/>
+          <p:cNvSpPr>
+            <a:spLocks noGrp="1"/>
+          </p:cNvSpPr>
+          <p:nvPr>
+            <p:ph type="sldNum" sz="quarter" idx="5"/>
+          </p:nvPr>
+        </p:nvSpPr>
+        <p:spPr>
+          <a:xfrm>
+            <a:off x="3884613" y="8685213"/>
+            <a:ext cx="2971800" cy="458787"/>
+          </a:xfrm>
+          <a:prstGeom prst="rect">
+            <a:avLst/>
+          </a:prstGeom>
+        </p:spPr>
+        <p:txBody>
+          <a:bodyPr vert="horz" lIns="91440" tIns="45720" rIns="91440" bIns="45720" rtlCol="0" anchor="b"/>
+          <a:lstStyle>
+            <a:lvl1pPr algn="r">
+              <a:defRPr sz="1200"/>
+            </a:lvl1pPr>
+          </a:lstStyle>
+          <a:p>
+            <a:fld id="{CF0A8AD8-189C-4515-8C12-7398E9C3F47A}" type="slidenum">
+              <a:rPr lang="en-AU" smtClean="0"/>
+              <a:t>‹#›</a:t>
+            </a:fld>
+            <a:endParaRPr lang="en-AU"/>
+          </a:p>
+        </p:txBody>
+      </p:sp>
+    </p:spTree>
+    <p:extLst>
+      <p:ext uri="{BB962C8B-B14F-4D97-AF65-F5344CB8AC3E}">
+        <p14:creationId xmlns:p14="http://schemas.microsoft.com/office/powerpoint/2010/main" val="3929969101"/>
+      </p:ext>
+    </p:extLst>
+  </p:cSld>
+  <p:clrMap bg1="lt1" tx1="dk1" bg2="lt2" tx2="dk2" accent1="accent1" accent2="accent2" accent3="accent3" accent4="accent4" accent5="accent5" accent6="accent6" hlink="hlink" folHlink="folHlink"/>
+  <p:notesStyle>
+    <a:lvl1pPr marL="0" algn="l" defTabSz="914400" rtl="0" eaLnBrk="1" latinLnBrk="0" hangingPunct="1">
+      <a:defRPr sz="1200" kern="1200">
+        <a:solidFill>
+          <a:schemeClr val="tx1"/>
+        </a:solidFill>
+        <a:latin typeface="+mn-lt"/>
+        <a:ea typeface="+mn-ea"/>
+        <a:cs typeface="+mn-cs"/>
+      </a:defRPr>
+    </a:lvl1pPr>
+    <a:lvl2pPr marL="457200" algn="l" defTabSz="914400" rtl="0" eaLnBrk="1" latinLnBrk="0" hangingPunct="1">
+      <a:defRPr sz="1200" kern="1200">
+        <a:solidFill>
+          <a:schemeClr val="tx1"/>
+        </a:solidFill>
+        <a:latin typeface="+mn-lt"/>
+        <a:ea typeface="+mn-ea"/>
+        <a:cs typeface="+mn-cs"/>
+      </a:defRPr>
+    </a:lvl2pPr>
+    <a:lvl3pPr marL="914400" algn="l" defTabSz="914400" rtl="0" eaLnBrk="1" latinLnBrk="0" hangingPunct="1">
+      <a:defRPr sz="1200" kern="1200">
+        <a:solidFill>
+          <a:schemeClr val="tx1"/>
+        </a:solidFill>
+        <a:latin typeface="+mn-lt"/>
+        <a:ea typeface="+mn-ea"/>
+        <a:cs typeface="+mn-cs"/>
+      </a:defRPr>
+    </a:lvl3pPr>
+    <a:lvl4pPr marL="1371600" algn="l" defTabSz="914400" rtl="0" eaLnBrk="1" latinLnBrk="0" hangingPunct="1">
+      <a:defRPr sz="1200" kern="1200">
+        <a:solidFill>
+          <a:schemeClr val="tx1"/>
+        </a:solidFill>
+        <a:latin typeface="+mn-lt"/>
+        <a:ea typeface="+mn-ea"/>
+        <a:cs typeface="+mn-cs"/>
+      </a:defRPr>
+    </a:lvl4pPr>
+    <a:lvl5pPr marL="1828800" algn="l" defTabSz="914400" rtl="0" eaLnBrk="1" latinLnBrk="0" hangingPunct="1">
+      <a:defRPr sz="1200" kern="1200">
+        <a:solidFill>
+          <a:schemeClr val="tx1"/>
+        </a:solidFill>
+        <a:latin typeface="+mn-lt"/>
+        <a:ea typeface="+mn-ea"/>
+        <a:cs typeface="+mn-cs"/>
+      </a:defRPr>
+    </a:lvl5pPr>
+    <a:lvl6pPr marL="2286000" algn="l" defTabSz="914400" rtl="0" eaLnBrk="1" latinLnBrk="0" hangingPunct="1">
+      <a:defRPr sz="1200" kern="1200">
+        <a:solidFill>
+          <a:schemeClr val="tx1"/>
+        </a:solidFill>
+        <a:latin typeface="+mn-lt"/>
+        <a:ea typeface="+mn-ea"/>
+        <a:cs typeface="+mn-cs"/>
+      </a:defRPr>
+    </a:lvl6pPr>
+    <a:lvl7pPr marL="2743200" algn="l" defTabSz="914400" rtl="0" eaLnBrk="1" latinLnBrk="0" hangingPunct="1">
+      <a:defRPr sz="1200" kern="1200">
+        <a:solidFill>
+          <a:schemeClr val="tx1"/>
+        </a:solidFill>
+        <a:latin typeface="+mn-lt"/>
+        <a:ea typeface="+mn-ea"/>
+        <a:cs typeface="+mn-cs"/>
+      </a:defRPr>
+    </a:lvl7pPr>
+    <a:lvl8pPr marL="3200400" algn="l" defTabSz="914400" rtl="0" eaLnBrk="1" latinLnBrk="0" hangingPunct="1">
+      <a:defRPr sz="1200" kern="1200">
+        <a:solidFill>
+          <a:schemeClr val="tx1"/>
+        </a:solidFill>
+        <a:latin typeface="+mn-lt"/>
+        <a:ea typeface="+mn-ea"/>
+        <a:cs typeface="+mn-cs"/>
+      </a:defRPr>
+    </a:lvl8pPr>
+    <a:lvl9pPr marL="3657600" algn="l" defTabSz="914400" rtl="0" eaLnBrk="1" latinLnBrk="0" hangingPunct="1">
+      <a:defRPr sz="1200" kern="1200">
+        <a:solidFill>
+          <a:schemeClr val="tx1"/>
+        </a:solidFill>
+        <a:latin typeface="+mn-lt"/>
+        <a:ea typeface="+mn-ea"/>
+        <a:cs typeface="+mn-cs"/>
+      </a:defRPr>
+    </a:lvl9pPr>
+  </p:notesStyle>
+</p:notesMaster>
+</file>
+
+<file path=ppt/notesSlides/notesSlide1.xml><?xml version="1.0" encoding="utf-8"?>
+<p:notes xmlns:a="http://schemas.openxmlformats.org/drawingml/2006/main" xmlns:r="http://schemas.openxmlformats.org/officeDocument/2006/relationships" xmlns:p="http://schemas.openxmlformats.org/presentationml/2006/main">
+  <p:cSld>
+    <p:spTree>
+      <p:nvGrpSpPr>
+        <p:cNvPr id="1" name=""/>
+        <p:cNvGrpSpPr/>
+        <p:nvPr/>
+      </p:nvGrpSpPr>
+      <p:grpSpPr>
+        <a:xfrm>
+          <a:off x="0" y="0"/>
+          <a:ext cx="0" cy="0"/>
+          <a:chOff x="0" y="0"/>
+          <a:chExt cx="0" cy="0"/>
+        </a:xfrm>
+      </p:grpSpPr>
+      <p:sp>
+        <p:nvSpPr>
+          <p:cNvPr id="2" name="Slide Image Placeholder 1"/>
+          <p:cNvSpPr>
+            <a:spLocks noGrp="1" noRot="1" noChangeAspect="1"/>
+          </p:cNvSpPr>
+          <p:nvPr>
+            <p:ph type="sldImg"/>
+          </p:nvPr>
+        </p:nvSpPr>
+        <p:spPr/>
+      </p:sp>
+      <p:sp>
+        <p:nvSpPr>
+          <p:cNvPr id="3" name="Notes Placeholder 2"/>
+          <p:cNvSpPr>
+            <a:spLocks noGrp="1"/>
+          </p:cNvSpPr>
+          <p:nvPr>
+            <p:ph type="body" idx="1"/>
+          </p:nvPr>
+        </p:nvSpPr>
+        <p:spPr/>
+        <p:txBody>
+          <a:bodyPr/>
+          <a:lstStyle/>
+          <a:p>
+            <a:r>
+              <a:rPr lang="en-US" dirty="0"/>
+              <a:t>Teacher Notes: </a:t>
+            </a:r>
+          </a:p>
+          <a:p>
+            <a:endParaRPr lang="en-US" dirty="0"/>
+          </a:p>
+          <a:p>
+            <a:r>
+              <a:rPr lang="en-US" dirty="0"/>
+              <a:t>Velociraptor is an open-source endpoint visibility and digital forensic tool meaning it acts as a host-based agent that allows security teams to collect, monitor, and query forensic artefacts across endpoints in real time. </a:t>
+            </a:r>
+          </a:p>
+          <a:p>
+            <a:r>
+              <a:rPr lang="en-US" dirty="0"/>
+              <a:t>By deploying Velociraptor agents across systems, organizations can quickly investigate incidents, detect malicious activity, and feed telemetry back into a Security Information and Event Management (SIEM) system.</a:t>
+            </a:r>
+            <a:endParaRPr lang="en-AU" dirty="0"/>
+          </a:p>
+          <a:p>
+            <a:endParaRPr lang="en-AU" dirty="0"/>
+          </a:p>
+        </p:txBody>
+      </p:sp>
+      <p:sp>
+        <p:nvSpPr>
+          <p:cNvPr id="4" name="Slide Number Placeholder 3"/>
+          <p:cNvSpPr>
+            <a:spLocks noGrp="1"/>
+          </p:cNvSpPr>
+          <p:nvPr>
+            <p:ph type="sldNum" sz="quarter" idx="5"/>
+          </p:nvPr>
+        </p:nvSpPr>
+        <p:spPr/>
+        <p:txBody>
+          <a:bodyPr/>
+          <a:lstStyle/>
+          <a:p>
+            <a:fld id="{CF0A8AD8-189C-4515-8C12-7398E9C3F47A}" type="slidenum">
+              <a:rPr lang="en-AU" smtClean="0"/>
+              <a:t>2</a:t>
+            </a:fld>
+            <a:endParaRPr lang="en-AU"/>
+          </a:p>
+        </p:txBody>
+      </p:sp>
+    </p:spTree>
+    <p:extLst>
+      <p:ext uri="{BB962C8B-B14F-4D97-AF65-F5344CB8AC3E}">
+        <p14:creationId xmlns:p14="http://schemas.microsoft.com/office/powerpoint/2010/main" val="2614324177"/>
+      </p:ext>
+    </p:extLst>
+  </p:cSld>
+  <p:clrMapOvr>
+    <a:masterClrMapping/>
+  </p:clrMapOvr>
+</p:notes>
+</file>
+
+<file path=ppt/notesSlides/notesSlide2.xml><?xml version="1.0" encoding="utf-8"?>
+<p:notes xmlns:a="http://schemas.openxmlformats.org/drawingml/2006/main" xmlns:r="http://schemas.openxmlformats.org/officeDocument/2006/relationships" xmlns:p="http://schemas.openxmlformats.org/presentationml/2006/main">
+  <p:cSld>
+    <p:spTree>
+      <p:nvGrpSpPr>
+        <p:cNvPr id="1" name=""/>
+        <p:cNvGrpSpPr/>
+        <p:nvPr/>
+      </p:nvGrpSpPr>
+      <p:grpSpPr>
+        <a:xfrm>
+          <a:off x="0" y="0"/>
+          <a:ext cx="0" cy="0"/>
+          <a:chOff x="0" y="0"/>
+          <a:chExt cx="0" cy="0"/>
+        </a:xfrm>
+      </p:grpSpPr>
+      <p:sp>
+        <p:nvSpPr>
+          <p:cNvPr id="2" name="Slide Image Placeholder 1"/>
+          <p:cNvSpPr>
+            <a:spLocks noGrp="1" noRot="1" noChangeAspect="1"/>
+          </p:cNvSpPr>
+          <p:nvPr>
+            <p:ph type="sldImg"/>
+          </p:nvPr>
+        </p:nvSpPr>
+        <p:spPr/>
+      </p:sp>
+      <p:sp>
+        <p:nvSpPr>
+          <p:cNvPr id="3" name="Notes Placeholder 2"/>
+          <p:cNvSpPr>
+            <a:spLocks noGrp="1"/>
+          </p:cNvSpPr>
+          <p:nvPr>
+            <p:ph type="body" idx="1"/>
+          </p:nvPr>
+        </p:nvSpPr>
+        <p:spPr/>
+        <p:txBody>
+          <a:bodyPr/>
+          <a:lstStyle/>
+          <a:p>
+            <a:r>
+              <a:rPr lang="en-US" dirty="0"/>
+              <a:t>Teacher Notes:</a:t>
+            </a:r>
+          </a:p>
+          <a:p>
+            <a:endParaRPr lang="en-US" dirty="0"/>
+          </a:p>
+          <a:p>
+            <a:pPr marL="0" marR="0" lvl="0" indent="0" algn="l" defTabSz="914400" rtl="0" eaLnBrk="1" fontAlgn="auto" latinLnBrk="0" hangingPunct="1">
+              <a:lnSpc>
+                <a:spcPct val="100000"/>
+              </a:lnSpc>
+              <a:spcBef>
+                <a:spcPts val="0"/>
+              </a:spcBef>
+              <a:spcAft>
+                <a:spcPts val="0"/>
+              </a:spcAft>
+              <a:buClrTx/>
+              <a:buSzTx/>
+              <a:buFontTx/>
+              <a:buNone/>
+              <a:tabLst/>
+              <a:defRPr/>
+            </a:pPr>
+            <a:r>
+              <a:rPr lang="en-AU" dirty="0"/>
+              <a:t>When Velociraptor is deployed on a network the host machines to collect data and send back to velociraptor server which we use to analyse and use to determine malicious behaviour. </a:t>
+            </a:r>
+          </a:p>
+          <a:p>
+            <a:endParaRPr lang="en-AU" dirty="0"/>
+          </a:p>
+        </p:txBody>
+      </p:sp>
+      <p:sp>
+        <p:nvSpPr>
+          <p:cNvPr id="4" name="Slide Number Placeholder 3"/>
+          <p:cNvSpPr>
+            <a:spLocks noGrp="1"/>
+          </p:cNvSpPr>
+          <p:nvPr>
+            <p:ph type="sldNum" sz="quarter" idx="5"/>
+          </p:nvPr>
+        </p:nvSpPr>
+        <p:spPr/>
+        <p:txBody>
+          <a:bodyPr/>
+          <a:lstStyle/>
+          <a:p>
+            <a:fld id="{CF0A8AD8-189C-4515-8C12-7398E9C3F47A}" type="slidenum">
+              <a:rPr lang="en-AU" smtClean="0"/>
+              <a:t>3</a:t>
+            </a:fld>
+            <a:endParaRPr lang="en-AU"/>
+          </a:p>
+        </p:txBody>
+      </p:sp>
+    </p:spTree>
+    <p:extLst>
+      <p:ext uri="{BB962C8B-B14F-4D97-AF65-F5344CB8AC3E}">
+        <p14:creationId xmlns:p14="http://schemas.microsoft.com/office/powerpoint/2010/main" val="1277016110"/>
+      </p:ext>
+    </p:extLst>
+  </p:cSld>
+  <p:clrMapOvr>
+    <a:masterClrMapping/>
+  </p:clrMapOvr>
+</p:notes>
+</file>
+
+<file path=ppt/notesSlides/notesSlide3.xml><?xml version="1.0" encoding="utf-8"?>
+<p:notes xmlns:a="http://schemas.openxmlformats.org/drawingml/2006/main" xmlns:r="http://schemas.openxmlformats.org/officeDocument/2006/relationships" xmlns:p="http://schemas.openxmlformats.org/presentationml/2006/main">
+  <p:cSld>
+    <p:spTree>
+      <p:nvGrpSpPr>
+        <p:cNvPr id="1" name=""/>
+        <p:cNvGrpSpPr/>
+        <p:nvPr/>
+      </p:nvGrpSpPr>
+      <p:grpSpPr>
+        <a:xfrm>
+          <a:off x="0" y="0"/>
+          <a:ext cx="0" cy="0"/>
+          <a:chOff x="0" y="0"/>
+          <a:chExt cx="0" cy="0"/>
+        </a:xfrm>
+      </p:grpSpPr>
+      <p:sp>
+        <p:nvSpPr>
+          <p:cNvPr id="2" name="Slide Image Placeholder 1"/>
+          <p:cNvSpPr>
+            <a:spLocks noGrp="1" noRot="1" noChangeAspect="1"/>
+          </p:cNvSpPr>
+          <p:nvPr>
+            <p:ph type="sldImg"/>
+          </p:nvPr>
+        </p:nvSpPr>
+        <p:spPr/>
+      </p:sp>
+      <p:sp>
+        <p:nvSpPr>
+          <p:cNvPr id="3" name="Notes Placeholder 2"/>
+          <p:cNvSpPr>
+            <a:spLocks noGrp="1"/>
+          </p:cNvSpPr>
+          <p:nvPr>
+            <p:ph type="body" idx="1"/>
+          </p:nvPr>
+        </p:nvSpPr>
+        <p:spPr/>
+        <p:txBody>
+          <a:bodyPr/>
+          <a:lstStyle/>
+          <a:p>
+            <a:r>
+              <a:rPr lang="en-US" dirty="0"/>
+              <a:t>Teacher Notes: </a:t>
+            </a:r>
+          </a:p>
+          <a:p>
+            <a:endParaRPr lang="en-US" dirty="0"/>
+          </a:p>
+          <a:p>
+            <a:r>
+              <a:rPr lang="en-US" dirty="0"/>
+              <a:t>Searching the VFS can be heavily taxing on the SIEM, searching recursively should be used when what's in the directory is know.</a:t>
+            </a:r>
+            <a:endParaRPr lang="en-AU" dirty="0"/>
+          </a:p>
+        </p:txBody>
+      </p:sp>
+      <p:sp>
+        <p:nvSpPr>
+          <p:cNvPr id="4" name="Slide Number Placeholder 3"/>
+          <p:cNvSpPr>
+            <a:spLocks noGrp="1"/>
+          </p:cNvSpPr>
+          <p:nvPr>
+            <p:ph type="sldNum" sz="quarter" idx="5"/>
+          </p:nvPr>
+        </p:nvSpPr>
+        <p:spPr/>
+        <p:txBody>
+          <a:bodyPr/>
+          <a:lstStyle/>
+          <a:p>
+            <a:fld id="{CF0A8AD8-189C-4515-8C12-7398E9C3F47A}" type="slidenum">
+              <a:rPr lang="en-AU" smtClean="0"/>
+              <a:t>4</a:t>
+            </a:fld>
+            <a:endParaRPr lang="en-AU"/>
+          </a:p>
+        </p:txBody>
+      </p:sp>
+    </p:spTree>
+    <p:extLst>
+      <p:ext uri="{BB962C8B-B14F-4D97-AF65-F5344CB8AC3E}">
+        <p14:creationId xmlns:p14="http://schemas.microsoft.com/office/powerpoint/2010/main" val="2867753567"/>
+      </p:ext>
+    </p:extLst>
+  </p:cSld>
+  <p:clrMapOvr>
+    <a:masterClrMapping/>
+  </p:clrMapOvr>
+</p:notes>
+</file>
+
+<file path=ppt/notesSlides/notesSlide4.xml><?xml version="1.0" encoding="utf-8"?>
+<p:notes xmlns:a="http://schemas.openxmlformats.org/drawingml/2006/main" xmlns:r="http://schemas.openxmlformats.org/officeDocument/2006/relationships" xmlns:p="http://schemas.openxmlformats.org/presentationml/2006/main">
+  <p:cSld>
+    <p:spTree>
+      <p:nvGrpSpPr>
+        <p:cNvPr id="1" name=""/>
+        <p:cNvGrpSpPr/>
+        <p:nvPr/>
+      </p:nvGrpSpPr>
+      <p:grpSpPr>
+        <a:xfrm>
+          <a:off x="0" y="0"/>
+          <a:ext cx="0" cy="0"/>
+          <a:chOff x="0" y="0"/>
+          <a:chExt cx="0" cy="0"/>
+        </a:xfrm>
+      </p:grpSpPr>
+      <p:sp>
+        <p:nvSpPr>
+          <p:cNvPr id="2" name="Slide Image Placeholder 1"/>
+          <p:cNvSpPr>
+            <a:spLocks noGrp="1" noRot="1" noChangeAspect="1"/>
+          </p:cNvSpPr>
+          <p:nvPr>
+            <p:ph type="sldImg"/>
+          </p:nvPr>
+        </p:nvSpPr>
+        <p:spPr/>
+      </p:sp>
+      <p:sp>
+        <p:nvSpPr>
+          <p:cNvPr id="3" name="Notes Placeholder 2"/>
+          <p:cNvSpPr>
+            <a:spLocks noGrp="1"/>
+          </p:cNvSpPr>
+          <p:nvPr>
+            <p:ph type="body" idx="1"/>
+          </p:nvPr>
+        </p:nvSpPr>
+        <p:spPr/>
+        <p:txBody>
+          <a:bodyPr/>
+          <a:lstStyle/>
+          <a:p>
+            <a:endParaRPr lang="en-US" dirty="0"/>
+          </a:p>
+        </p:txBody>
+      </p:sp>
+      <p:sp>
+        <p:nvSpPr>
+          <p:cNvPr id="4" name="Slide Number Placeholder 3"/>
+          <p:cNvSpPr>
+            <a:spLocks noGrp="1"/>
+          </p:cNvSpPr>
+          <p:nvPr>
+            <p:ph type="sldNum" sz="quarter" idx="5"/>
+          </p:nvPr>
+        </p:nvSpPr>
+        <p:spPr/>
+        <p:txBody>
+          <a:bodyPr/>
+          <a:lstStyle/>
+          <a:p>
+            <a:fld id="{CF0A8AD8-189C-4515-8C12-7398E9C3F47A}" type="slidenum">
+              <a:rPr lang="en-AU" smtClean="0"/>
+              <a:t>5</a:t>
+            </a:fld>
+            <a:endParaRPr lang="en-AU"/>
+          </a:p>
+        </p:txBody>
+      </p:sp>
+    </p:spTree>
+    <p:extLst>
+      <p:ext uri="{BB962C8B-B14F-4D97-AF65-F5344CB8AC3E}">
+        <p14:creationId xmlns:p14="http://schemas.microsoft.com/office/powerpoint/2010/main" val="1632991060"/>
+      </p:ext>
+    </p:extLst>
+  </p:cSld>
+  <p:clrMapOvr>
+    <a:masterClrMapping/>
+  </p:clrMapOvr>
+</p:notes>
+</file>
+
+<file path=ppt/notesSlides/notesSlide5.xml><?xml version="1.0" encoding="utf-8"?>
+<p:notes xmlns:a="http://schemas.openxmlformats.org/drawingml/2006/main" xmlns:r="http://schemas.openxmlformats.org/officeDocument/2006/relationships" xmlns:p="http://schemas.openxmlformats.org/presentationml/2006/main">
+  <p:cSld>
+    <p:spTree>
+      <p:nvGrpSpPr>
+        <p:cNvPr id="1" name=""/>
+        <p:cNvGrpSpPr/>
+        <p:nvPr/>
+      </p:nvGrpSpPr>
+      <p:grpSpPr>
+        <a:xfrm>
+          <a:off x="0" y="0"/>
+          <a:ext cx="0" cy="0"/>
+          <a:chOff x="0" y="0"/>
+          <a:chExt cx="0" cy="0"/>
+        </a:xfrm>
+      </p:grpSpPr>
+      <p:sp>
+        <p:nvSpPr>
+          <p:cNvPr id="2" name="Slide Image Placeholder 1"/>
+          <p:cNvSpPr>
+            <a:spLocks noGrp="1" noRot="1" noChangeAspect="1"/>
+          </p:cNvSpPr>
+          <p:nvPr>
+            <p:ph type="sldImg"/>
+          </p:nvPr>
+        </p:nvSpPr>
+        <p:spPr/>
+      </p:sp>
+      <p:sp>
+        <p:nvSpPr>
+          <p:cNvPr id="3" name="Notes Placeholder 2"/>
+          <p:cNvSpPr>
+            <a:spLocks noGrp="1"/>
+          </p:cNvSpPr>
+          <p:nvPr>
+            <p:ph type="body" idx="1"/>
+          </p:nvPr>
+        </p:nvSpPr>
+        <p:spPr/>
+        <p:txBody>
+          <a:bodyPr/>
+          <a:lstStyle/>
+          <a:p>
+            <a:endParaRPr lang="en-US" dirty="0"/>
+          </a:p>
+        </p:txBody>
+      </p:sp>
+      <p:sp>
+        <p:nvSpPr>
+          <p:cNvPr id="4" name="Slide Number Placeholder 3"/>
+          <p:cNvSpPr>
+            <a:spLocks noGrp="1"/>
+          </p:cNvSpPr>
+          <p:nvPr>
+            <p:ph type="sldNum" sz="quarter" idx="5"/>
+          </p:nvPr>
+        </p:nvSpPr>
+        <p:spPr/>
+        <p:txBody>
+          <a:bodyPr/>
+          <a:lstStyle/>
+          <a:p>
+            <a:fld id="{CF0A8AD8-189C-4515-8C12-7398E9C3F47A}" type="slidenum">
+              <a:rPr lang="en-AU" smtClean="0"/>
+              <a:t>6</a:t>
+            </a:fld>
+            <a:endParaRPr lang="en-AU"/>
+          </a:p>
+        </p:txBody>
+      </p:sp>
+    </p:spTree>
+    <p:extLst>
+      <p:ext uri="{BB962C8B-B14F-4D97-AF65-F5344CB8AC3E}">
+        <p14:creationId xmlns:p14="http://schemas.microsoft.com/office/powerpoint/2010/main" val="2983267238"/>
+      </p:ext>
+    </p:extLst>
+  </p:cSld>
+  <p:clrMapOvr>
+    <a:masterClrMapping/>
+  </p:clrMapOvr>
+</p:notes>
+</file>
+
+<file path=ppt/notesSlides/notesSlide6.xml><?xml version="1.0" encoding="utf-8"?>
+<p:notes xmlns:a="http://schemas.openxmlformats.org/drawingml/2006/main" xmlns:r="http://schemas.openxmlformats.org/officeDocument/2006/relationships" xmlns:p="http://schemas.openxmlformats.org/presentationml/2006/main">
+  <p:cSld>
+    <p:spTree>
+      <p:nvGrpSpPr>
+        <p:cNvPr id="1" name=""/>
+        <p:cNvGrpSpPr/>
+        <p:nvPr/>
+      </p:nvGrpSpPr>
+      <p:grpSpPr>
+        <a:xfrm>
+          <a:off x="0" y="0"/>
+          <a:ext cx="0" cy="0"/>
+          <a:chOff x="0" y="0"/>
+          <a:chExt cx="0" cy="0"/>
+        </a:xfrm>
+      </p:grpSpPr>
+      <p:sp>
+        <p:nvSpPr>
+          <p:cNvPr id="2" name="Slide Image Placeholder 1"/>
+          <p:cNvSpPr>
+            <a:spLocks noGrp="1" noRot="1" noChangeAspect="1"/>
+          </p:cNvSpPr>
+          <p:nvPr>
+            <p:ph type="sldImg"/>
+          </p:nvPr>
+        </p:nvSpPr>
+        <p:spPr/>
+      </p:sp>
+      <p:sp>
+        <p:nvSpPr>
+          <p:cNvPr id="3" name="Notes Placeholder 2"/>
+          <p:cNvSpPr>
+            <a:spLocks noGrp="1"/>
+          </p:cNvSpPr>
+          <p:nvPr>
+            <p:ph type="body" idx="1"/>
+          </p:nvPr>
+        </p:nvSpPr>
+        <p:spPr/>
+        <p:txBody>
+          <a:bodyPr/>
+          <a:lstStyle/>
+          <a:p>
+            <a:r>
+              <a:rPr lang="en-US" dirty="0"/>
+              <a:t>Teacher Notes:</a:t>
+            </a:r>
+          </a:p>
+          <a:p>
+            <a:endParaRPr lang="en-US" dirty="0"/>
+          </a:p>
+          <a:p>
+            <a:r>
+              <a:rPr lang="en-US" dirty="0"/>
+              <a:t>Hunts can be very resource intensive depending on the hunt and should be ran with caution to not overload SIEM</a:t>
+            </a:r>
+            <a:endParaRPr lang="en-AU" dirty="0"/>
+          </a:p>
+        </p:txBody>
+      </p:sp>
+      <p:sp>
+        <p:nvSpPr>
+          <p:cNvPr id="4" name="Slide Number Placeholder 3"/>
+          <p:cNvSpPr>
+            <a:spLocks noGrp="1"/>
+          </p:cNvSpPr>
+          <p:nvPr>
+            <p:ph type="sldNum" sz="quarter" idx="5"/>
+          </p:nvPr>
+        </p:nvSpPr>
+        <p:spPr/>
+        <p:txBody>
+          <a:bodyPr/>
+          <a:lstStyle/>
+          <a:p>
+            <a:fld id="{CF0A8AD8-189C-4515-8C12-7398E9C3F47A}" type="slidenum">
+              <a:rPr lang="en-AU" smtClean="0"/>
+              <a:t>8</a:t>
+            </a:fld>
+            <a:endParaRPr lang="en-AU"/>
+          </a:p>
+        </p:txBody>
+      </p:sp>
+    </p:spTree>
+    <p:extLst>
+      <p:ext uri="{BB962C8B-B14F-4D97-AF65-F5344CB8AC3E}">
+        <p14:creationId xmlns:p14="http://schemas.microsoft.com/office/powerpoint/2010/main" val="3043700457"/>
+      </p:ext>
+    </p:extLst>
+  </p:cSld>
+  <p:clrMapOvr>
+    <a:masterClrMapping/>
+  </p:clrMapOvr>
+</p:notes>
+</file>
+
+<file path=ppt/notesSlides/notesSlide7.xml><?xml version="1.0" encoding="utf-8"?>
+<p:notes xmlns:a="http://schemas.openxmlformats.org/drawingml/2006/main" xmlns:r="http://schemas.openxmlformats.org/officeDocument/2006/relationships" xmlns:p="http://schemas.openxmlformats.org/presentationml/2006/main">
+  <p:cSld>
+    <p:spTree>
+      <p:nvGrpSpPr>
+        <p:cNvPr id="1" name=""/>
+        <p:cNvGrpSpPr/>
+        <p:nvPr/>
+      </p:nvGrpSpPr>
+      <p:grpSpPr>
+        <a:xfrm>
+          <a:off x="0" y="0"/>
+          <a:ext cx="0" cy="0"/>
+          <a:chOff x="0" y="0"/>
+          <a:chExt cx="0" cy="0"/>
+        </a:xfrm>
+      </p:grpSpPr>
+      <p:sp>
+        <p:nvSpPr>
+          <p:cNvPr id="2" name="Slide Image Placeholder 1"/>
+          <p:cNvSpPr>
+            <a:spLocks noGrp="1" noRot="1" noChangeAspect="1"/>
+          </p:cNvSpPr>
+          <p:nvPr>
+            <p:ph type="sldImg"/>
+          </p:nvPr>
+        </p:nvSpPr>
+        <p:spPr/>
+      </p:sp>
+      <p:sp>
+        <p:nvSpPr>
+          <p:cNvPr id="3" name="Notes Placeholder 2"/>
+          <p:cNvSpPr>
+            <a:spLocks noGrp="1"/>
+          </p:cNvSpPr>
+          <p:nvPr>
+            <p:ph type="body" idx="1"/>
+          </p:nvPr>
+        </p:nvSpPr>
+        <p:spPr/>
+        <p:txBody>
+          <a:bodyPr/>
+          <a:lstStyle/>
+          <a:p>
+            <a:r>
+              <a:rPr lang="en-US" dirty="0"/>
+              <a:t>Teacher Note:</a:t>
+            </a:r>
+          </a:p>
+          <a:p>
+            <a:endParaRPr lang="en-US" dirty="0"/>
+          </a:p>
+          <a:p>
+            <a:r>
+              <a:rPr lang="en-US" dirty="0"/>
+              <a:t>This is important to look at as some hunts are very broad by default and could impact your SIEM if unchecked</a:t>
+            </a:r>
+            <a:endParaRPr lang="en-AU" dirty="0"/>
+          </a:p>
+        </p:txBody>
+      </p:sp>
+      <p:sp>
+        <p:nvSpPr>
+          <p:cNvPr id="4" name="Slide Number Placeholder 3"/>
+          <p:cNvSpPr>
+            <a:spLocks noGrp="1"/>
+          </p:cNvSpPr>
+          <p:nvPr>
+            <p:ph type="sldNum" sz="quarter" idx="5"/>
+          </p:nvPr>
+        </p:nvSpPr>
+        <p:spPr/>
+        <p:txBody>
+          <a:bodyPr/>
+          <a:lstStyle/>
+          <a:p>
+            <a:fld id="{CF0A8AD8-189C-4515-8C12-7398E9C3F47A}" type="slidenum">
+              <a:rPr lang="en-AU" smtClean="0"/>
+              <a:t>9</a:t>
+            </a:fld>
+            <a:endParaRPr lang="en-AU"/>
+          </a:p>
+        </p:txBody>
+      </p:sp>
+    </p:spTree>
+    <p:extLst>
+      <p:ext uri="{BB962C8B-B14F-4D97-AF65-F5344CB8AC3E}">
+        <p14:creationId xmlns:p14="http://schemas.microsoft.com/office/powerpoint/2010/main" val="2167306296"/>
+      </p:ext>
+    </p:extLst>
+  </p:cSld>
+  <p:clrMapOvr>
+    <a:masterClrMapping/>
+  </p:clrMapOvr>
+</p:notes>
+</file>
+
+<file path=ppt/notesSlides/notesSlide8.xml><?xml version="1.0" encoding="utf-8"?>
+<p:notes xmlns:a="http://schemas.openxmlformats.org/drawingml/2006/main" xmlns:r="http://schemas.openxmlformats.org/officeDocument/2006/relationships" xmlns:p="http://schemas.openxmlformats.org/presentationml/2006/main">
+  <p:cSld>
+    <p:spTree>
+      <p:nvGrpSpPr>
+        <p:cNvPr id="1" name=""/>
+        <p:cNvGrpSpPr/>
+        <p:nvPr/>
+      </p:nvGrpSpPr>
+      <p:grpSpPr>
+        <a:xfrm>
+          <a:off x="0" y="0"/>
+          <a:ext cx="0" cy="0"/>
+          <a:chOff x="0" y="0"/>
+          <a:chExt cx="0" cy="0"/>
+        </a:xfrm>
+      </p:grpSpPr>
+      <p:sp>
+        <p:nvSpPr>
+          <p:cNvPr id="2" name="Slide Image Placeholder 1"/>
+          <p:cNvSpPr>
+            <a:spLocks noGrp="1" noRot="1" noChangeAspect="1"/>
+          </p:cNvSpPr>
+          <p:nvPr>
+            <p:ph type="sldImg"/>
+          </p:nvPr>
+        </p:nvSpPr>
+        <p:spPr/>
+      </p:sp>
+      <p:sp>
+        <p:nvSpPr>
+          <p:cNvPr id="3" name="Notes Placeholder 2"/>
+          <p:cNvSpPr>
+            <a:spLocks noGrp="1"/>
+          </p:cNvSpPr>
+          <p:nvPr>
+            <p:ph type="body" idx="1"/>
+          </p:nvPr>
+        </p:nvSpPr>
+        <p:spPr/>
+        <p:txBody>
+          <a:bodyPr/>
+          <a:lstStyle/>
+          <a:p>
+            <a:r>
+              <a:rPr lang="en-US" dirty="0"/>
+              <a:t>Teacher Notes:</a:t>
+            </a:r>
+          </a:p>
+          <a:p>
+            <a:endParaRPr lang="en-US" dirty="0"/>
+          </a:p>
+          <a:p>
+            <a:r>
+              <a:rPr lang="en-US" dirty="0"/>
+              <a:t>You can check the status of your hunt by viewing the state column.</a:t>
+            </a:r>
+          </a:p>
+          <a:p>
+            <a:endParaRPr lang="en-US" dirty="0"/>
+          </a:p>
+          <a:p>
+            <a:r>
+              <a:rPr lang="en-US" dirty="0"/>
+              <a:t>When viewing your output you would generally view it in the SIEM but you can quickly check in velociraptor to confirm that you are getting data from the hunt first.</a:t>
+            </a:r>
+          </a:p>
+        </p:txBody>
+      </p:sp>
+      <p:sp>
+        <p:nvSpPr>
+          <p:cNvPr id="4" name="Slide Number Placeholder 3"/>
+          <p:cNvSpPr>
+            <a:spLocks noGrp="1"/>
+          </p:cNvSpPr>
+          <p:nvPr>
+            <p:ph type="sldNum" sz="quarter" idx="5"/>
+          </p:nvPr>
+        </p:nvSpPr>
+        <p:spPr/>
+        <p:txBody>
+          <a:bodyPr/>
+          <a:lstStyle/>
+          <a:p>
+            <a:fld id="{CF0A8AD8-189C-4515-8C12-7398E9C3F47A}" type="slidenum">
+              <a:rPr lang="en-AU" smtClean="0"/>
+              <a:t>10</a:t>
+            </a:fld>
+            <a:endParaRPr lang="en-AU"/>
+          </a:p>
+        </p:txBody>
+      </p:sp>
+    </p:spTree>
+    <p:extLst>
+      <p:ext uri="{BB962C8B-B14F-4D97-AF65-F5344CB8AC3E}">
+        <p14:creationId xmlns:p14="http://schemas.microsoft.com/office/powerpoint/2010/main" val="1642185002"/>
+      </p:ext>
+    </p:extLst>
+  </p:cSld>
+  <p:clrMapOvr>
+    <a:masterClrMapping/>
+  </p:clrMapOvr>
+</p:notes>
+</file>
+
+<file path=ppt/notesSlides/notesSlide9.xml><?xml version="1.0" encoding="utf-8"?>
+<p:notes xmlns:a="http://schemas.openxmlformats.org/drawingml/2006/main" xmlns:r="http://schemas.openxmlformats.org/officeDocument/2006/relationships" xmlns:p="http://schemas.openxmlformats.org/presentationml/2006/main">
+  <p:cSld>
+    <p:spTree>
+      <p:nvGrpSpPr>
+        <p:cNvPr id="1" name=""/>
+        <p:cNvGrpSpPr/>
+        <p:nvPr/>
+      </p:nvGrpSpPr>
+      <p:grpSpPr>
+        <a:xfrm>
+          <a:off x="0" y="0"/>
+          <a:ext cx="0" cy="0"/>
+          <a:chOff x="0" y="0"/>
+          <a:chExt cx="0" cy="0"/>
+        </a:xfrm>
+      </p:grpSpPr>
+      <p:sp>
+        <p:nvSpPr>
+          <p:cNvPr id="2" name="Slide Image Placeholder 1"/>
+          <p:cNvSpPr>
+            <a:spLocks noGrp="1" noRot="1" noChangeAspect="1"/>
+          </p:cNvSpPr>
+          <p:nvPr>
+            <p:ph type="sldImg"/>
+          </p:nvPr>
+        </p:nvSpPr>
+        <p:spPr/>
+      </p:sp>
+      <p:sp>
+        <p:nvSpPr>
+          <p:cNvPr id="3" name="Notes Placeholder 2"/>
+          <p:cNvSpPr>
+            <a:spLocks noGrp="1"/>
+          </p:cNvSpPr>
+          <p:nvPr>
+            <p:ph type="body" idx="1"/>
+          </p:nvPr>
+        </p:nvSpPr>
+        <p:spPr/>
+        <p:txBody>
+          <a:bodyPr/>
+          <a:lstStyle/>
+          <a:p>
+            <a:r>
+              <a:rPr lang="en-US" dirty="0"/>
+              <a:t>Teacher Note:</a:t>
+            </a:r>
+          </a:p>
+          <a:p>
+            <a:endParaRPr lang="en-US" dirty="0"/>
+          </a:p>
+          <a:p>
+            <a:r>
+              <a:rPr lang="en-US" dirty="0"/>
+              <a:t>Use velociraptor series immersive labs.</a:t>
+            </a:r>
+            <a:endParaRPr lang="en-AU" dirty="0"/>
+          </a:p>
+        </p:txBody>
+      </p:sp>
+      <p:sp>
+        <p:nvSpPr>
+          <p:cNvPr id="4" name="Slide Number Placeholder 3"/>
+          <p:cNvSpPr>
+            <a:spLocks noGrp="1"/>
+          </p:cNvSpPr>
+          <p:nvPr>
+            <p:ph type="sldNum" sz="quarter" idx="5"/>
+          </p:nvPr>
+        </p:nvSpPr>
+        <p:spPr/>
+        <p:txBody>
+          <a:bodyPr/>
+          <a:lstStyle/>
+          <a:p>
+            <a:fld id="{CF0A8AD8-189C-4515-8C12-7398E9C3F47A}" type="slidenum">
+              <a:rPr lang="en-AU" smtClean="0"/>
+              <a:t>11</a:t>
+            </a:fld>
+            <a:endParaRPr lang="en-AU"/>
+          </a:p>
+        </p:txBody>
+      </p:sp>
+    </p:spTree>
+    <p:extLst>
+      <p:ext uri="{BB962C8B-B14F-4D97-AF65-F5344CB8AC3E}">
+        <p14:creationId xmlns:p14="http://schemas.microsoft.com/office/powerpoint/2010/main" val="236692906"/>
+      </p:ext>
+    </p:extLst>
+  </p:cSld>
+  <p:clrMapOvr>
+    <a:masterClrMapping/>
+  </p:clrMapOvr>
+</p:notes>
+</file>
+
 <file path=ppt/slideLayouts/slideLayout1.xml><?xml version="1.0" encoding="utf-8"?>
 <p:sldLayout xmlns:a="http://schemas.openxmlformats.org/drawingml/2006/main" xmlns:r="http://schemas.openxmlformats.org/officeDocument/2006/relationships" xmlns:p="http://schemas.openxmlformats.org/presentationml/2006/main" type="title" preserve="1">
   <p:cSld name="Title Slide">
@@ -272,7 +1507,7 @@
           <a:p>
             <a:fld id="{E7B8E0CB-18B2-4FF0-B730-DD57310780AA}" type="datetimeFigureOut">
               <a:rPr lang="en-AU" smtClean="0"/>
-              <a:t>15/01/2026</a:t>
+              <a:t>14/04/2026</a:t>
             </a:fld>
             <a:endParaRPr lang="en-AU"/>
           </a:p>
@@ -472,7 +1707,7 @@
           <a:p>
             <a:fld id="{E7B8E0CB-18B2-4FF0-B730-DD57310780AA}" type="datetimeFigureOut">
               <a:rPr lang="en-AU" smtClean="0"/>
-              <a:t>15/01/2026</a:t>
+              <a:t>14/04/2026</a:t>
             </a:fld>
             <a:endParaRPr lang="en-AU"/>
           </a:p>
@@ -682,7 +1917,7 @@
           <a:p>
             <a:fld id="{E7B8E0CB-18B2-4FF0-B730-DD57310780AA}" type="datetimeFigureOut">
               <a:rPr lang="en-AU" smtClean="0"/>
-              <a:t>15/01/2026</a:t>
+              <a:t>14/04/2026</a:t>
             </a:fld>
             <a:endParaRPr lang="en-AU"/>
           </a:p>
@@ -882,7 +2117,7 @@
           <a:p>
             <a:fld id="{E7B8E0CB-18B2-4FF0-B730-DD57310780AA}" type="datetimeFigureOut">
               <a:rPr lang="en-AU" smtClean="0"/>
-              <a:t>15/01/2026</a:t>
+              <a:t>14/04/2026</a:t>
             </a:fld>
             <a:endParaRPr lang="en-AU"/>
           </a:p>
@@ -1158,7 +2393,7 @@
           <a:p>
             <a:fld id="{E7B8E0CB-18B2-4FF0-B730-DD57310780AA}" type="datetimeFigureOut">
               <a:rPr lang="en-AU" smtClean="0"/>
-              <a:t>15/01/2026</a:t>
+              <a:t>14/04/2026</a:t>
             </a:fld>
             <a:endParaRPr lang="en-AU"/>
           </a:p>
@@ -1426,7 +2661,7 @@
           <a:p>
             <a:fld id="{E7B8E0CB-18B2-4FF0-B730-DD57310780AA}" type="datetimeFigureOut">
               <a:rPr lang="en-AU" smtClean="0"/>
-              <a:t>15/01/2026</a:t>
+              <a:t>14/04/2026</a:t>
             </a:fld>
             <a:endParaRPr lang="en-AU"/>
           </a:p>
@@ -1841,7 +3076,7 @@
           <a:p>
             <a:fld id="{E7B8E0CB-18B2-4FF0-B730-DD57310780AA}" type="datetimeFigureOut">
               <a:rPr lang="en-AU" smtClean="0"/>
-              <a:t>15/01/2026</a:t>
+              <a:t>14/04/2026</a:t>
             </a:fld>
             <a:endParaRPr lang="en-AU"/>
           </a:p>
@@ -1983,7 +3218,7 @@
           <a:p>
             <a:fld id="{E7B8E0CB-18B2-4FF0-B730-DD57310780AA}" type="datetimeFigureOut">
               <a:rPr lang="en-AU" smtClean="0"/>
-              <a:t>15/01/2026</a:t>
+              <a:t>14/04/2026</a:t>
             </a:fld>
             <a:endParaRPr lang="en-AU"/>
           </a:p>
@@ -2096,7 +3331,7 @@
           <a:p>
             <a:fld id="{E7B8E0CB-18B2-4FF0-B730-DD57310780AA}" type="datetimeFigureOut">
               <a:rPr lang="en-AU" smtClean="0"/>
-              <a:t>15/01/2026</a:t>
+              <a:t>14/04/2026</a:t>
             </a:fld>
             <a:endParaRPr lang="en-AU"/>
           </a:p>
@@ -2409,7 +3644,7 @@
           <a:p>
             <a:fld id="{E7B8E0CB-18B2-4FF0-B730-DD57310780AA}" type="datetimeFigureOut">
               <a:rPr lang="en-AU" smtClean="0"/>
-              <a:t>15/01/2026</a:t>
+              <a:t>14/04/2026</a:t>
             </a:fld>
             <a:endParaRPr lang="en-AU"/>
           </a:p>
@@ -2698,7 +3933,7 @@
           <a:p>
             <a:fld id="{E7B8E0CB-18B2-4FF0-B730-DD57310780AA}" type="datetimeFigureOut">
               <a:rPr lang="en-AU" smtClean="0"/>
-              <a:t>15/01/2026</a:t>
+              <a:t>14/04/2026</a:t>
             </a:fld>
             <a:endParaRPr lang="en-AU"/>
           </a:p>
@@ -2941,7 +4176,7 @@
           <a:p>
             <a:fld id="{E7B8E0CB-18B2-4FF0-B730-DD57310780AA}" type="datetimeFigureOut">
               <a:rPr lang="en-AU" smtClean="0"/>
-              <a:t>15/01/2026</a:t>
+              <a:t>14/04/2026</a:t>
             </a:fld>
             <a:endParaRPr lang="en-AU"/>
           </a:p>
@@ -3446,7 +4681,7 @@
           <p:cNvPr id="2" name="Title 1">
             <a:extLst>
               <a:ext uri="{FF2B5EF4-FFF2-40B4-BE49-F238E27FC236}">
-                <a16:creationId xmlns:a16="http://schemas.microsoft.com/office/drawing/2014/main" id="{EEAB8A46-8E9E-C4A4-723E-645A49D99AD1}"/>
+                <a16:creationId xmlns:a16="http://schemas.microsoft.com/office/drawing/2014/main" id="{557B8F53-A3AA-C923-EF35-309BE6574596}"/>
               </a:ext>
             </a:extLst>
           </p:cNvPr>
@@ -3464,7 +4699,7 @@
           <a:p>
             <a:r>
               <a:rPr lang="en-AU" dirty="0"/>
-              <a:t>Running Hunt Part 2</a:t>
+              <a:t>View your Hunt output</a:t>
             </a:r>
           </a:p>
         </p:txBody>
@@ -3474,7 +4709,7 @@
           <p:cNvPr id="3" name="Content Placeholder 2">
             <a:extLst>
               <a:ext uri="{FF2B5EF4-FFF2-40B4-BE49-F238E27FC236}">
-                <a16:creationId xmlns:a16="http://schemas.microsoft.com/office/drawing/2014/main" id="{7B84A449-0160-A6A9-D3FB-BCF73D469317}"/>
+                <a16:creationId xmlns:a16="http://schemas.microsoft.com/office/drawing/2014/main" id="{CFAC1602-A5CE-C5A4-A0E3-CAB7978293D5}"/>
               </a:ext>
             </a:extLst>
           </p:cNvPr>
@@ -3485,26 +4720,35 @@
             <p:ph idx="1"/>
           </p:nvPr>
         </p:nvSpPr>
-        <p:spPr/>
+        <p:spPr>
+          <a:xfrm>
+            <a:off x="683381" y="1883682"/>
+            <a:ext cx="10515600" cy="4351338"/>
+          </a:xfrm>
+        </p:spPr>
         <p:txBody>
           <a:bodyPr/>
           <a:lstStyle/>
           <a:p>
             <a:r>
               <a:rPr lang="en-AU" dirty="0"/>
-              <a:t>Able to configure parameters such as </a:t>
-            </a:r>
-            <a:r>
-              <a:rPr lang="en-AU" dirty="0" err="1"/>
-              <a:t>evtx</a:t>
-            </a:r>
+              <a:t>Check your hunt has finished running</a:t>
+            </a:r>
+          </a:p>
+          <a:p>
+            <a:endParaRPr lang="en-AU" dirty="0"/>
+          </a:p>
+          <a:p>
+            <a:endParaRPr lang="en-AU" dirty="0"/>
+          </a:p>
+          <a:p>
+            <a:endParaRPr lang="en-AU" dirty="0"/>
+          </a:p>
+          <a:p>
             <a:r>
               <a:rPr lang="en-AU" dirty="0"/>
-              <a:t> hunt get only Security logs. </a:t>
-            </a:r>
-          </a:p>
-          <a:p>
-            <a:endParaRPr lang="en-AU" dirty="0"/>
+              <a:t>View your output </a:t>
+            </a:r>
           </a:p>
           <a:p>
             <a:endParaRPr lang="en-AU" dirty="0"/>
@@ -3516,7 +4760,7 @@
           <p:cNvPr id="5" name="Picture 4">
             <a:extLst>
               <a:ext uri="{FF2B5EF4-FFF2-40B4-BE49-F238E27FC236}">
-                <a16:creationId xmlns:a16="http://schemas.microsoft.com/office/drawing/2014/main" id="{4616812F-6F08-DA18-254E-4CC3AF4A400F}"/>
+                <a16:creationId xmlns:a16="http://schemas.microsoft.com/office/drawing/2014/main" id="{B6D3E260-340B-F8F3-9586-C16A45B60094}"/>
               </a:ext>
             </a:extLst>
           </p:cNvPr>
@@ -3526,151 +4770,7 @@
           <p:nvPr/>
         </p:nvPicPr>
         <p:blipFill>
-          <a:blip r:embed="rId2"/>
-          <a:stretch>
-            <a:fillRect/>
-          </a:stretch>
-        </p:blipFill>
-        <p:spPr>
-          <a:xfrm>
-            <a:off x="3098948" y="3096227"/>
-            <a:ext cx="5994103" cy="3215673"/>
-          </a:xfrm>
-          <a:prstGeom prst="rect">
-            <a:avLst/>
-          </a:prstGeom>
-          <a:ln w="25400">
-            <a:solidFill>
-              <a:schemeClr val="tx1"/>
-            </a:solidFill>
-          </a:ln>
-        </p:spPr>
-      </p:pic>
-    </p:spTree>
-    <p:extLst>
-      <p:ext uri="{BB962C8B-B14F-4D97-AF65-F5344CB8AC3E}">
-        <p14:creationId xmlns:p14="http://schemas.microsoft.com/office/powerpoint/2010/main" val="828334266"/>
-      </p:ext>
-    </p:extLst>
-  </p:cSld>
-  <p:clrMapOvr>
-    <a:masterClrMapping/>
-  </p:clrMapOvr>
-</p:sld>
-</file>
-
-<file path=ppt/slides/slide11.xml><?xml version="1.0" encoding="utf-8"?>
-<p:sld xmlns:a="http://schemas.openxmlformats.org/drawingml/2006/main" xmlns:r="http://schemas.openxmlformats.org/officeDocument/2006/relationships" xmlns:p="http://schemas.openxmlformats.org/presentationml/2006/main">
-  <p:cSld>
-    <p:spTree>
-      <p:nvGrpSpPr>
-        <p:cNvPr id="1" name=""/>
-        <p:cNvGrpSpPr/>
-        <p:nvPr/>
-      </p:nvGrpSpPr>
-      <p:grpSpPr>
-        <a:xfrm>
-          <a:off x="0" y="0"/>
-          <a:ext cx="0" cy="0"/>
-          <a:chOff x="0" y="0"/>
-          <a:chExt cx="0" cy="0"/>
-        </a:xfrm>
-      </p:grpSpPr>
-      <p:sp>
-        <p:nvSpPr>
-          <p:cNvPr id="2" name="Title 1">
-            <a:extLst>
-              <a:ext uri="{FF2B5EF4-FFF2-40B4-BE49-F238E27FC236}">
-                <a16:creationId xmlns:a16="http://schemas.microsoft.com/office/drawing/2014/main" id="{557B8F53-A3AA-C923-EF35-309BE6574596}"/>
-              </a:ext>
-            </a:extLst>
-          </p:cNvPr>
-          <p:cNvSpPr>
-            <a:spLocks noGrp="1"/>
-          </p:cNvSpPr>
-          <p:nvPr>
-            <p:ph type="title"/>
-          </p:nvPr>
-        </p:nvSpPr>
-        <p:spPr/>
-        <p:txBody>
-          <a:bodyPr/>
-          <a:lstStyle/>
-          <a:p>
-            <a:r>
-              <a:rPr lang="en-AU" dirty="0"/>
-              <a:t>View your Hunt output</a:t>
-            </a:r>
-          </a:p>
-        </p:txBody>
-      </p:sp>
-      <p:sp>
-        <p:nvSpPr>
-          <p:cNvPr id="3" name="Content Placeholder 2">
-            <a:extLst>
-              <a:ext uri="{FF2B5EF4-FFF2-40B4-BE49-F238E27FC236}">
-                <a16:creationId xmlns:a16="http://schemas.microsoft.com/office/drawing/2014/main" id="{CFAC1602-A5CE-C5A4-A0E3-CAB7978293D5}"/>
-              </a:ext>
-            </a:extLst>
-          </p:cNvPr>
-          <p:cNvSpPr>
-            <a:spLocks noGrp="1"/>
-          </p:cNvSpPr>
-          <p:nvPr>
-            <p:ph idx="1"/>
-          </p:nvPr>
-        </p:nvSpPr>
-        <p:spPr>
-          <a:xfrm>
-            <a:off x="683381" y="1883682"/>
-            <a:ext cx="10515600" cy="4351338"/>
-          </a:xfrm>
-        </p:spPr>
-        <p:txBody>
-          <a:bodyPr/>
-          <a:lstStyle/>
-          <a:p>
-            <a:r>
-              <a:rPr lang="en-AU" dirty="0"/>
-              <a:t>Check your hunt has finished running</a:t>
-            </a:r>
-          </a:p>
-          <a:p>
-            <a:endParaRPr lang="en-AU" dirty="0"/>
-          </a:p>
-          <a:p>
-            <a:endParaRPr lang="en-AU" dirty="0"/>
-          </a:p>
-          <a:p>
-            <a:endParaRPr lang="en-AU" dirty="0"/>
-          </a:p>
-          <a:p>
-            <a:r>
-              <a:rPr lang="en-AU" dirty="0"/>
-              <a:t>View your output </a:t>
-            </a:r>
-          </a:p>
-          <a:p>
-            <a:endParaRPr lang="en-AU" dirty="0"/>
-          </a:p>
-        </p:txBody>
-      </p:sp>
-      <p:pic>
-        <p:nvPicPr>
-          <p:cNvPr id="5" name="Picture 4">
-            <a:extLst>
-              <a:ext uri="{FF2B5EF4-FFF2-40B4-BE49-F238E27FC236}">
-                <a16:creationId xmlns:a16="http://schemas.microsoft.com/office/drawing/2014/main" id="{B6D3E260-340B-F8F3-9586-C16A45B60094}"/>
-              </a:ext>
-            </a:extLst>
-          </p:cNvPr>
-          <p:cNvPicPr>
-            <a:picLocks noChangeAspect="1"/>
-          </p:cNvPicPr>
-          <p:nvPr/>
-        </p:nvPicPr>
-        <p:blipFill>
-          <a:blip r:embed="rId2"/>
+          <a:blip r:embed="rId3"/>
           <a:stretch>
             <a:fillRect/>
           </a:stretch>
@@ -3705,7 +4805,7 @@
           <p:nvPr/>
         </p:nvPicPr>
         <p:blipFill>
-          <a:blip r:embed="rId3"/>
+          <a:blip r:embed="rId4"/>
           <a:stretch>
             <a:fillRect/>
           </a:stretch>
@@ -3738,7 +4838,7 @@
 </p:sld>
 </file>
 
-<file path=ppt/slides/slide12.xml><?xml version="1.0" encoding="utf-8"?>
+<file path=ppt/slides/slide11.xml><?xml version="1.0" encoding="utf-8"?>
 <p:sld xmlns:a="http://schemas.openxmlformats.org/drawingml/2006/main" xmlns:r="http://schemas.openxmlformats.org/officeDocument/2006/relationships" xmlns:p="http://schemas.openxmlformats.org/presentationml/2006/main">
   <p:cSld>
     <p:spTree>
@@ -3893,7 +4993,7 @@
           <a:p>
             <a:r>
               <a:rPr lang="en-AU" dirty="0"/>
-              <a:t>What is Velociraptor</a:t>
+              <a:t>What is Velociraptor?</a:t>
             </a:r>
           </a:p>
         </p:txBody>
@@ -3921,21 +5021,12 @@
           <a:p>
             <a:r>
               <a:rPr lang="en-US" dirty="0"/>
-              <a:t>Velociraptor is an open-source endpoint visibility and digital forensic tool. </a:t>
-            </a:r>
-          </a:p>
-          <a:p>
-            <a:r>
-              <a:rPr lang="en-US" dirty="0"/>
-              <a:t>It acts as a host-based agent that allows security teams to collect, monitor, and query forensic artefacts across endpoints in real time. </a:t>
-            </a:r>
-          </a:p>
-          <a:p>
-            <a:r>
-              <a:rPr lang="en-US" dirty="0"/>
-              <a:t>By deploying Velociraptor agents across systems, organizations can quickly investigate incidents, detect malicious activity, and feed telemetry back into a Security Information and Event Management (SIEM) system.</a:t>
-            </a:r>
-            <a:endParaRPr lang="en-AU" dirty="0"/>
+              <a:t>Velociraptor is an open-source endpoint visibility and digital forensic tool - </a:t>
+            </a:r>
+            <a:r>
+              <a:rPr lang="en-AU" dirty="0"/>
+              <a:t>What does that mean?</a:t>
+            </a:r>
           </a:p>
         </p:txBody>
       </p:sp>
@@ -3992,47 +5083,8 @@
           <a:p>
             <a:r>
               <a:rPr lang="en-AU" dirty="0"/>
-              <a:t>Scenario</a:t>
-            </a:r>
-          </a:p>
-        </p:txBody>
-      </p:sp>
-      <p:sp>
-        <p:nvSpPr>
-          <p:cNvPr id="3" name="Content Placeholder 2">
-            <a:extLst>
-              <a:ext uri="{FF2B5EF4-FFF2-40B4-BE49-F238E27FC236}">
-                <a16:creationId xmlns:a16="http://schemas.microsoft.com/office/drawing/2014/main" id="{82F96C90-8EA6-C503-00FC-8807D8024F8E}"/>
-              </a:ext>
-            </a:extLst>
-          </p:cNvPr>
-          <p:cNvSpPr>
-            <a:spLocks noGrp="1"/>
-          </p:cNvSpPr>
-          <p:nvPr>
-            <p:ph idx="1"/>
-          </p:nvPr>
-        </p:nvSpPr>
-        <p:spPr/>
-        <p:txBody>
-          <a:bodyPr/>
-          <a:lstStyle/>
-          <a:p>
-            <a:r>
-              <a:rPr lang="en-AU" dirty="0"/>
-              <a:t>Put velociraptor on the host machines to collect data and send back to </a:t>
-            </a:r>
-            <a:r>
-              <a:rPr lang="en-AU"/>
-              <a:t>velociraptor server which </a:t>
-            </a:r>
-            <a:r>
-              <a:rPr lang="en-AU" dirty="0"/>
-              <a:t>we use to analyse and determine malicious behaviour. </a:t>
-            </a:r>
-          </a:p>
-          <a:p>
-            <a:endParaRPr lang="en-AU" dirty="0"/>
+              <a:t>Scenario – Deploying Velociraptor</a:t>
+            </a:r>
           </a:p>
         </p:txBody>
       </p:sp>
@@ -4051,15 +5103,15 @@
           <p:nvPr/>
         </p:nvPicPr>
         <p:blipFill>
-          <a:blip r:embed="rId2"/>
+          <a:blip r:embed="rId3"/>
           <a:stretch>
             <a:fillRect/>
           </a:stretch>
         </p:blipFill>
         <p:spPr>
           <a:xfrm>
-            <a:off x="3221890" y="2957444"/>
-            <a:ext cx="5514275" cy="3354456"/>
+            <a:off x="1789670" y="1610370"/>
+            <a:ext cx="8231659" cy="5007501"/>
           </a:xfrm>
           <a:prstGeom prst="rect">
             <a:avLst/>
@@ -4184,7 +5236,7 @@
           <p:nvPr/>
         </p:nvPicPr>
         <p:blipFill>
-          <a:blip r:embed="rId2"/>
+          <a:blip r:embed="rId3"/>
           <a:stretch>
             <a:fillRect/>
           </a:stretch>
@@ -4261,11 +5313,11 @@
             </a:r>
             <a:r>
               <a:rPr lang="en-AU" dirty="0" err="1"/>
-              <a:t>Powershell</a:t>
+              <a:t>powershell</a:t>
             </a:r>
             <a:r>
               <a:rPr lang="en-AU" dirty="0"/>
-              <a:t> on remote machines </a:t>
+              <a:t> on remote machines through velociraptor</a:t>
             </a:r>
           </a:p>
         </p:txBody>
@@ -4327,7 +5379,7 @@
           <p:nvPr/>
         </p:nvPicPr>
         <p:blipFill>
-          <a:blip r:embed="rId2"/>
+          <a:blip r:embed="rId3"/>
           <a:stretch>
             <a:fillRect/>
           </a:stretch>
@@ -4451,7 +5503,7 @@
           <p:nvPr/>
         </p:nvPicPr>
         <p:blipFill>
-          <a:blip r:embed="rId2"/>
+          <a:blip r:embed="rId3"/>
           <a:stretch>
             <a:fillRect/>
           </a:stretch>
@@ -4647,7 +5699,7 @@
           <p:cNvPr id="2" name="Title 1">
             <a:extLst>
               <a:ext uri="{FF2B5EF4-FFF2-40B4-BE49-F238E27FC236}">
-                <a16:creationId xmlns:a16="http://schemas.microsoft.com/office/drawing/2014/main" id="{87DFB526-5D49-0F4B-187C-C11DD8B21CDA}"/>
+                <a16:creationId xmlns:a16="http://schemas.microsoft.com/office/drawing/2014/main" id="{219B2E74-CD29-68E3-3B50-F88D0B3BB985}"/>
               </a:ext>
             </a:extLst>
           </p:cNvPr>
@@ -4665,7 +5717,7 @@
           <a:p>
             <a:r>
               <a:rPr lang="en-AU" dirty="0"/>
-              <a:t>Velociraptor Setup </a:t>
+              <a:t>Running a hunt</a:t>
             </a:r>
           </a:p>
         </p:txBody>
@@ -4675,7 +5727,7 @@
           <p:cNvPr id="3" name="Content Placeholder 2">
             <a:extLst>
               <a:ext uri="{FF2B5EF4-FFF2-40B4-BE49-F238E27FC236}">
-                <a16:creationId xmlns:a16="http://schemas.microsoft.com/office/drawing/2014/main" id="{B0A8EB4C-9AEE-4651-5A1C-6C8EC6B45F9B}"/>
+                <a16:creationId xmlns:a16="http://schemas.microsoft.com/office/drawing/2014/main" id="{1B42A568-E0E4-440D-AAED-6394B51B9FC2}"/>
               </a:ext>
             </a:extLst>
           </p:cNvPr>
@@ -4692,21 +5744,19 @@
           <a:lstStyle/>
           <a:p>
             <a:r>
+              <a:rPr lang="en-US" dirty="0"/>
+              <a:t>Running hunts allows us to query connected clients for data.</a:t>
+            </a:r>
+          </a:p>
+          <a:p>
+            <a:r>
+              <a:rPr lang="en-US" dirty="0" err="1"/>
+              <a:t>i.e</a:t>
+            </a:r>
+            <a:r>
               <a:rPr lang="en-AU" dirty="0"/>
-              <a:t>follow the document setup on git hub page </a:t>
-            </a:r>
-          </a:p>
-          <a:p>
-            <a:endParaRPr lang="en-AU" dirty="0"/>
-          </a:p>
-          <a:p>
-            <a:r>
-              <a:rPr lang="en-AU" dirty="0"/>
-              <a:t>To confirm successful velociraptor setup, click the magnifying glass to check how many clients.</a:t>
-            </a:r>
-          </a:p>
-          <a:p>
-            <a:endParaRPr lang="en-AU" dirty="0"/>
+              <a:t>  running processes, files, network connections</a:t>
+            </a:r>
           </a:p>
           <a:p>
             <a:endParaRPr lang="en-AU" dirty="0"/>
@@ -4718,7 +5768,7 @@
           <p:cNvPr id="5" name="Picture 4">
             <a:extLst>
               <a:ext uri="{FF2B5EF4-FFF2-40B4-BE49-F238E27FC236}">
-                <a16:creationId xmlns:a16="http://schemas.microsoft.com/office/drawing/2014/main" id="{8B983958-2737-2120-08D4-13865BA688F9}"/>
+                <a16:creationId xmlns:a16="http://schemas.microsoft.com/office/drawing/2014/main" id="{D292183C-59A6-1B77-80A8-CF2197A9DB88}"/>
               </a:ext>
             </a:extLst>
           </p:cNvPr>
@@ -4728,15 +5778,50 @@
           <p:nvPr/>
         </p:nvPicPr>
         <p:blipFill>
-          <a:blip r:embed="rId2"/>
+          <a:blip r:embed="rId3"/>
           <a:stretch>
             <a:fillRect/>
           </a:stretch>
         </p:blipFill>
         <p:spPr>
           <a:xfrm>
-            <a:off x="2207729" y="4699598"/>
-            <a:ext cx="7516678" cy="1177258"/>
+            <a:off x="78859" y="3652762"/>
+            <a:ext cx="6151301" cy="2999619"/>
+          </a:xfrm>
+          <a:prstGeom prst="rect">
+            <a:avLst/>
+          </a:prstGeom>
+          <a:ln w="25400">
+            <a:solidFill>
+              <a:schemeClr val="tx1"/>
+            </a:solidFill>
+          </a:ln>
+        </p:spPr>
+      </p:pic>
+      <p:pic>
+        <p:nvPicPr>
+          <p:cNvPr id="7" name="Picture 6">
+            <a:extLst>
+              <a:ext uri="{FF2B5EF4-FFF2-40B4-BE49-F238E27FC236}">
+                <a16:creationId xmlns:a16="http://schemas.microsoft.com/office/drawing/2014/main" id="{0FC5F69E-27BD-44BB-D33B-DF6201987271}"/>
+              </a:ext>
+            </a:extLst>
+          </p:cNvPr>
+          <p:cNvPicPr>
+            <a:picLocks noChangeAspect="1"/>
+          </p:cNvPicPr>
+          <p:nvPr/>
+        </p:nvPicPr>
+        <p:blipFill>
+          <a:blip r:embed="rId4"/>
+          <a:stretch>
+            <a:fillRect/>
+          </a:stretch>
+        </p:blipFill>
+        <p:spPr>
+          <a:xfrm>
+            <a:off x="6880787" y="3493105"/>
+            <a:ext cx="5170409" cy="3196915"/>
           </a:xfrm>
           <a:prstGeom prst="rect">
             <a:avLst/>
@@ -4751,7 +5836,7 @@
     </p:spTree>
     <p:extLst>
       <p:ext uri="{BB962C8B-B14F-4D97-AF65-F5344CB8AC3E}">
-        <p14:creationId xmlns:p14="http://schemas.microsoft.com/office/powerpoint/2010/main" val="1416494689"/>
+        <p14:creationId xmlns:p14="http://schemas.microsoft.com/office/powerpoint/2010/main" val="2007346314"/>
       </p:ext>
     </p:extLst>
   </p:cSld>
@@ -4783,7 +5868,7 @@
           <p:cNvPr id="2" name="Title 1">
             <a:extLst>
               <a:ext uri="{FF2B5EF4-FFF2-40B4-BE49-F238E27FC236}">
-                <a16:creationId xmlns:a16="http://schemas.microsoft.com/office/drawing/2014/main" id="{219B2E74-CD29-68E3-3B50-F88D0B3BB985}"/>
+                <a16:creationId xmlns:a16="http://schemas.microsoft.com/office/drawing/2014/main" id="{EEAB8A46-8E9E-C4A4-723E-645A49D99AD1}"/>
               </a:ext>
             </a:extLst>
           </p:cNvPr>
@@ -4801,7 +5886,7 @@
           <a:p>
             <a:r>
               <a:rPr lang="en-AU" dirty="0"/>
-              <a:t>Running Hunt Part 1</a:t>
+              <a:t>Running a hunt</a:t>
             </a:r>
           </a:p>
         </p:txBody>
@@ -4811,7 +5896,7 @@
           <p:cNvPr id="3" name="Content Placeholder 2">
             <a:extLst>
               <a:ext uri="{FF2B5EF4-FFF2-40B4-BE49-F238E27FC236}">
-                <a16:creationId xmlns:a16="http://schemas.microsoft.com/office/drawing/2014/main" id="{1B42A568-E0E4-440D-AAED-6394B51B9FC2}"/>
+                <a16:creationId xmlns:a16="http://schemas.microsoft.com/office/drawing/2014/main" id="{7B84A449-0160-A6A9-D3FB-BCF73D469317}"/>
               </a:ext>
             </a:extLst>
           </p:cNvPr>
@@ -4828,19 +5913,36 @@
           <a:lstStyle/>
           <a:p>
             <a:r>
-              <a:rPr lang="en-US" dirty="0"/>
-              <a:t>Running hunts allows lets us query connected clients for data</a:t>
-            </a:r>
-          </a:p>
-          <a:p>
-            <a:r>
-              <a:rPr lang="en-US" dirty="0" err="1"/>
-              <a:t>i.e</a:t>
-            </a:r>
-            <a:r>
               <a:rPr lang="en-AU" dirty="0"/>
-              <a:t>  running processes, files, network connections</a:t>
-            </a:r>
+              <a:t>Able to configure parameters in hunts, such as </a:t>
+            </a:r>
+            <a:r>
+              <a:rPr lang="en-AU" dirty="0" err="1"/>
+              <a:t>evtx</a:t>
+            </a:r>
+            <a:r>
+              <a:rPr lang="en-AU" dirty="0"/>
+              <a:t> hunt to get only Security logs in stead of the </a:t>
+            </a:r>
+            <a:r>
+              <a:rPr lang="en-AU" dirty="0" err="1"/>
+              <a:t>whlole</a:t>
+            </a:r>
+            <a:r>
+              <a:rPr lang="en-AU" dirty="0"/>
+              <a:t> </a:t>
+            </a:r>
+            <a:r>
+              <a:rPr lang="en-AU" dirty="0" err="1"/>
+              <a:t>evtx</a:t>
+            </a:r>
+            <a:r>
+              <a:rPr lang="en-AU" dirty="0"/>
+              <a:t> file. </a:t>
+            </a:r>
+          </a:p>
+          <a:p>
+            <a:endParaRPr lang="en-AU" dirty="0"/>
           </a:p>
           <a:p>
             <a:endParaRPr lang="en-AU" dirty="0"/>
@@ -4852,42 +5954,7 @@
           <p:cNvPr id="5" name="Picture 4">
             <a:extLst>
               <a:ext uri="{FF2B5EF4-FFF2-40B4-BE49-F238E27FC236}">
-                <a16:creationId xmlns:a16="http://schemas.microsoft.com/office/drawing/2014/main" id="{D292183C-59A6-1B77-80A8-CF2197A9DB88}"/>
-              </a:ext>
-            </a:extLst>
-          </p:cNvPr>
-          <p:cNvPicPr>
-            <a:picLocks noChangeAspect="1"/>
-          </p:cNvPicPr>
-          <p:nvPr/>
-        </p:nvPicPr>
-        <p:blipFill>
-          <a:blip r:embed="rId2"/>
-          <a:stretch>
-            <a:fillRect/>
-          </a:stretch>
-        </p:blipFill>
-        <p:spPr>
-          <a:xfrm>
-            <a:off x="78859" y="3652762"/>
-            <a:ext cx="6151301" cy="2999619"/>
-          </a:xfrm>
-          <a:prstGeom prst="rect">
-            <a:avLst/>
-          </a:prstGeom>
-          <a:ln w="25400">
-            <a:solidFill>
-              <a:schemeClr val="tx1"/>
-            </a:solidFill>
-          </a:ln>
-        </p:spPr>
-      </p:pic>
-      <p:pic>
-        <p:nvPicPr>
-          <p:cNvPr id="7" name="Picture 6">
-            <a:extLst>
-              <a:ext uri="{FF2B5EF4-FFF2-40B4-BE49-F238E27FC236}">
-                <a16:creationId xmlns:a16="http://schemas.microsoft.com/office/drawing/2014/main" id="{0FC5F69E-27BD-44BB-D33B-DF6201987271}"/>
+                <a16:creationId xmlns:a16="http://schemas.microsoft.com/office/drawing/2014/main" id="{4616812F-6F08-DA18-254E-4CC3AF4A400F}"/>
               </a:ext>
             </a:extLst>
           </p:cNvPr>
@@ -4904,8 +5971,8 @@
         </p:blipFill>
         <p:spPr>
           <a:xfrm>
-            <a:off x="6880787" y="3493105"/>
-            <a:ext cx="5170409" cy="3196915"/>
+            <a:off x="3098948" y="3096227"/>
+            <a:ext cx="5994103" cy="3215673"/>
           </a:xfrm>
           <a:prstGeom prst="rect">
             <a:avLst/>
@@ -4920,7 +5987,7 @@
     </p:spTree>
     <p:extLst>
       <p:ext uri="{BB962C8B-B14F-4D97-AF65-F5344CB8AC3E}">
-        <p14:creationId xmlns:p14="http://schemas.microsoft.com/office/powerpoint/2010/main" val="2007346314"/>
+        <p14:creationId xmlns:p14="http://schemas.microsoft.com/office/powerpoint/2010/main" val="828334266"/>
       </p:ext>
     </p:extLst>
   </p:cSld>
@@ -5243,4 +6310,319 @@
     </a:ext>
   </a:extLst>
 </a:theme>
+</file>
+
+<file path=ppt/theme/theme2.xml><?xml version="1.0" encoding="utf-8"?>
+<a:theme xmlns:a="http://schemas.openxmlformats.org/drawingml/2006/main" name="Office Theme">
+  <a:themeElements>
+    <a:clrScheme name="Office">
+      <a:dk1>
+        <a:sysClr val="windowText" lastClr="000000"/>
+      </a:dk1>
+      <a:lt1>
+        <a:sysClr val="window" lastClr="FFFFFF"/>
+      </a:lt1>
+      <a:dk2>
+        <a:srgbClr val="0E2841"/>
+      </a:dk2>
+      <a:lt2>
+        <a:srgbClr val="E8E8E8"/>
+      </a:lt2>
+      <a:accent1>
+        <a:srgbClr val="156082"/>
+      </a:accent1>
+      <a:accent2>
+        <a:srgbClr val="E97132"/>
+      </a:accent2>
+      <a:accent3>
+        <a:srgbClr val="196B24"/>
+      </a:accent3>
+      <a:accent4>
+        <a:srgbClr val="0F9ED5"/>
+      </a:accent4>
+      <a:accent5>
+        <a:srgbClr val="A02B93"/>
+      </a:accent5>
+      <a:accent6>
+        <a:srgbClr val="4EA72E"/>
+      </a:accent6>
+      <a:hlink>
+        <a:srgbClr val="467886"/>
+      </a:hlink>
+      <a:folHlink>
+        <a:srgbClr val="96607D"/>
+      </a:folHlink>
+    </a:clrScheme>
+    <a:fontScheme name="Office">
+      <a:majorFont>
+        <a:latin typeface="Aptos Display" panose="02110004020202020204"/>
+        <a:ea typeface=""/>
+        <a:cs typeface=""/>
+        <a:font script="Jpan" typeface="游ゴシック Light"/>
+        <a:font script="Hang" typeface="맑은 고딕"/>
+        <a:font script="Hans" typeface="等线 Light"/>
+        <a:font script="Hant" typeface="新細明體"/>
+        <a:font script="Arab" typeface="Times New Roman"/>
+        <a:font script="Hebr" typeface="Times New Roman"/>
+        <a:font script="Thai" typeface="Angsana New"/>
+        <a:font script="Ethi" typeface="Nyala"/>
+        <a:font script="Beng" typeface="Vrinda"/>
+        <a:font script="Gujr" typeface="Shruti"/>
+        <a:font script="Khmr" typeface="MoolBoran"/>
+        <a:font script="Knda" typeface="Tunga"/>
+        <a:font script="Guru" typeface="Raavi"/>
+        <a:font script="Cans" typeface="Euphemia"/>
+        <a:font script="Cher" typeface="Plantagenet Cherokee"/>
+        <a:font script="Yiii" typeface="Microsoft Yi Baiti"/>
+        <a:font script="Tibt" typeface="Microsoft Himalaya"/>
+        <a:font script="Thaa" typeface="MV Boli"/>
+        <a:font script="Deva" typeface="Mangal"/>
+        <a:font script="Telu" typeface="Gautami"/>
+        <a:font script="Taml" typeface="Latha"/>
+        <a:font script="Syrc" typeface="Estrangelo Edessa"/>
+        <a:font script="Orya" typeface="Kalinga"/>
+        <a:font script="Mlym" typeface="Kartika"/>
+        <a:font script="Laoo" typeface="DokChampa"/>
+        <a:font script="Sinh" typeface="Iskoola Pota"/>
+        <a:font script="Mong" typeface="Mongolian Baiti"/>
+        <a:font script="Viet" typeface="Times New Roman"/>
+        <a:font script="Uigh" typeface="Microsoft Uighur"/>
+        <a:font script="Geor" typeface="Sylfaen"/>
+        <a:font script="Armn" typeface="Arial"/>
+        <a:font script="Bugi" typeface="Leelawadee UI"/>
+        <a:font script="Bopo" typeface="Microsoft JhengHei"/>
+        <a:font script="Java" typeface="Javanese Text"/>
+        <a:font script="Lisu" typeface="Segoe UI"/>
+        <a:font script="Mymr" typeface="Myanmar Text"/>
+        <a:font script="Nkoo" typeface="Ebrima"/>
+        <a:font script="Olck" typeface="Nirmala UI"/>
+        <a:font script="Osma" typeface="Ebrima"/>
+        <a:font script="Phag" typeface="Phagspa"/>
+        <a:font script="Syrn" typeface="Estrangelo Edessa"/>
+        <a:font script="Syrj" typeface="Estrangelo Edessa"/>
+        <a:font script="Syre" typeface="Estrangelo Edessa"/>
+        <a:font script="Sora" typeface="Nirmala UI"/>
+        <a:font script="Tale" typeface="Microsoft Tai Le"/>
+        <a:font script="Talu" typeface="Microsoft New Tai Lue"/>
+        <a:font script="Tfng" typeface="Ebrima"/>
+      </a:majorFont>
+      <a:minorFont>
+        <a:latin typeface="Aptos" panose="02110004020202020204"/>
+        <a:ea typeface=""/>
+        <a:cs typeface=""/>
+        <a:font script="Jpan" typeface="游ゴシック"/>
+        <a:font script="Hang" typeface="맑은 고딕"/>
+        <a:font script="Hans" typeface="等线"/>
+        <a:font script="Hant" typeface="新細明體"/>
+        <a:font script="Arab" typeface="Arial"/>
+        <a:font script="Hebr" typeface="Arial"/>
+        <a:font script="Thai" typeface="Cordia New"/>
+        <a:font script="Ethi" typeface="Nyala"/>
+        <a:font script="Beng" typeface="Vrinda"/>
+        <a:font script="Gujr" typeface="Shruti"/>
+        <a:font script="Khmr" typeface="DaunPenh"/>
+        <a:font script="Knda" typeface="Tunga"/>
+        <a:font script="Guru" typeface="Raavi"/>
+        <a:font script="Cans" typeface="Euphemia"/>
+        <a:font script="Cher" typeface="Plantagenet Cherokee"/>
+        <a:font script="Yiii" typeface="Microsoft Yi Baiti"/>
+        <a:font script="Tibt" typeface="Microsoft Himalaya"/>
+        <a:font script="Thaa" typeface="MV Boli"/>
+        <a:font script="Deva" typeface="Mangal"/>
+        <a:font script="Telu" typeface="Gautami"/>
+        <a:font script="Taml" typeface="Latha"/>
+        <a:font script="Syrc" typeface="Estrangelo Edessa"/>
+        <a:font script="Orya" typeface="Kalinga"/>
+        <a:font script="Mlym" typeface="Kartika"/>
+        <a:font script="Laoo" typeface="DokChampa"/>
+        <a:font script="Sinh" typeface="Iskoola Pota"/>
+        <a:font script="Mong" typeface="Mongolian Baiti"/>
+        <a:font script="Viet" typeface="Arial"/>
+        <a:font script="Uigh" typeface="Microsoft Uighur"/>
+        <a:font script="Geor" typeface="Sylfaen"/>
+        <a:font script="Armn" typeface="Arial"/>
+        <a:font script="Bugi" typeface="Leelawadee UI"/>
+        <a:font script="Bopo" typeface="Microsoft JhengHei"/>
+        <a:font script="Java" typeface="Javanese Text"/>
+        <a:font script="Lisu" typeface="Segoe UI"/>
+        <a:font script="Mymr" typeface="Myanmar Text"/>
+        <a:font script="Nkoo" typeface="Ebrima"/>
+        <a:font script="Olck" typeface="Nirmala UI"/>
+        <a:font script="Osma" typeface="Ebrima"/>
+        <a:font script="Phag" typeface="Phagspa"/>
+        <a:font script="Syrn" typeface="Estrangelo Edessa"/>
+        <a:font script="Syrj" typeface="Estrangelo Edessa"/>
+        <a:font script="Syre" typeface="Estrangelo Edessa"/>
+        <a:font script="Sora" typeface="Nirmala UI"/>
+        <a:font script="Tale" typeface="Microsoft Tai Le"/>
+        <a:font script="Talu" typeface="Microsoft New Tai Lue"/>
+        <a:font script="Tfng" typeface="Ebrima"/>
+      </a:minorFont>
+    </a:fontScheme>
+    <a:fmtScheme name="Office">
+      <a:fillStyleLst>
+        <a:solidFill>
+          <a:schemeClr val="phClr"/>
+        </a:solidFill>
+        <a:gradFill rotWithShape="1">
+          <a:gsLst>
+            <a:gs pos="0">
+              <a:schemeClr val="phClr">
+                <a:lumMod val="110000"/>
+                <a:satMod val="105000"/>
+                <a:tint val="67000"/>
+              </a:schemeClr>
+            </a:gs>
+            <a:gs pos="50000">
+              <a:schemeClr val="phClr">
+                <a:lumMod val="105000"/>
+                <a:satMod val="103000"/>
+                <a:tint val="73000"/>
+              </a:schemeClr>
+            </a:gs>
+            <a:gs pos="100000">
+              <a:schemeClr val="phClr">
+                <a:lumMod val="105000"/>
+                <a:satMod val="109000"/>
+                <a:tint val="81000"/>
+              </a:schemeClr>
+            </a:gs>
+          </a:gsLst>
+          <a:lin ang="5400000" scaled="0"/>
+        </a:gradFill>
+        <a:gradFill rotWithShape="1">
+          <a:gsLst>
+            <a:gs pos="0">
+              <a:schemeClr val="phClr">
+                <a:satMod val="103000"/>
+                <a:lumMod val="102000"/>
+                <a:tint val="94000"/>
+              </a:schemeClr>
+            </a:gs>
+            <a:gs pos="50000">
+              <a:schemeClr val="phClr">
+                <a:satMod val="110000"/>
+                <a:lumMod val="100000"/>
+                <a:shade val="100000"/>
+              </a:schemeClr>
+            </a:gs>
+            <a:gs pos="100000">
+              <a:schemeClr val="phClr">
+                <a:lumMod val="99000"/>
+                <a:satMod val="120000"/>
+                <a:shade val="78000"/>
+              </a:schemeClr>
+            </a:gs>
+          </a:gsLst>
+          <a:lin ang="5400000" scaled="0"/>
+        </a:gradFill>
+      </a:fillStyleLst>
+      <a:lnStyleLst>
+        <a:ln w="12700" cap="flat" cmpd="sng" algn="ctr">
+          <a:solidFill>
+            <a:schemeClr val="phClr"/>
+          </a:solidFill>
+          <a:prstDash val="solid"/>
+          <a:miter lim="800000"/>
+        </a:ln>
+        <a:ln w="19050" cap="flat" cmpd="sng" algn="ctr">
+          <a:solidFill>
+            <a:schemeClr val="phClr"/>
+          </a:solidFill>
+          <a:prstDash val="solid"/>
+          <a:miter lim="800000"/>
+        </a:ln>
+        <a:ln w="25400" cap="flat" cmpd="sng" algn="ctr">
+          <a:solidFill>
+            <a:schemeClr val="phClr"/>
+          </a:solidFill>
+          <a:prstDash val="solid"/>
+          <a:miter lim="800000"/>
+        </a:ln>
+      </a:lnStyleLst>
+      <a:effectStyleLst>
+        <a:effectStyle>
+          <a:effectLst/>
+        </a:effectStyle>
+        <a:effectStyle>
+          <a:effectLst/>
+        </a:effectStyle>
+        <a:effectStyle>
+          <a:effectLst>
+            <a:outerShdw blurRad="57150" dist="19050" dir="5400000" algn="ctr" rotWithShape="0">
+              <a:srgbClr val="000000">
+                <a:alpha val="63000"/>
+              </a:srgbClr>
+            </a:outerShdw>
+          </a:effectLst>
+        </a:effectStyle>
+      </a:effectStyleLst>
+      <a:bgFillStyleLst>
+        <a:solidFill>
+          <a:schemeClr val="phClr"/>
+        </a:solidFill>
+        <a:solidFill>
+          <a:schemeClr val="phClr">
+            <a:tint val="95000"/>
+            <a:satMod val="170000"/>
+          </a:schemeClr>
+        </a:solidFill>
+        <a:gradFill rotWithShape="1">
+          <a:gsLst>
+            <a:gs pos="0">
+              <a:schemeClr val="phClr">
+                <a:tint val="93000"/>
+                <a:satMod val="150000"/>
+                <a:shade val="98000"/>
+                <a:lumMod val="102000"/>
+              </a:schemeClr>
+            </a:gs>
+            <a:gs pos="50000">
+              <a:schemeClr val="phClr">
+                <a:tint val="98000"/>
+                <a:satMod val="130000"/>
+                <a:shade val="90000"/>
+                <a:lumMod val="103000"/>
+              </a:schemeClr>
+            </a:gs>
+            <a:gs pos="100000">
+              <a:schemeClr val="phClr">
+                <a:shade val="63000"/>
+                <a:satMod val="120000"/>
+              </a:schemeClr>
+            </a:gs>
+          </a:gsLst>
+          <a:lin ang="5400000" scaled="0"/>
+        </a:gradFill>
+      </a:bgFillStyleLst>
+    </a:fmtScheme>
+  </a:themeElements>
+  <a:objectDefaults>
+    <a:lnDef>
+      <a:spPr/>
+      <a:bodyPr/>
+      <a:lstStyle/>
+      <a:style>
+        <a:lnRef idx="2">
+          <a:schemeClr val="accent1"/>
+        </a:lnRef>
+        <a:fillRef idx="0">
+          <a:schemeClr val="accent1"/>
+        </a:fillRef>
+        <a:effectRef idx="1">
+          <a:schemeClr val="accent1"/>
+        </a:effectRef>
+        <a:fontRef idx="minor">
+          <a:schemeClr val="tx1"/>
+        </a:fontRef>
+      </a:style>
+    </a:lnDef>
+  </a:objectDefaults>
+  <a:extraClrSchemeLst/>
+  <a:extLst>
+    <a:ext uri="{05A4C25C-085E-4340-85A3-A5531E510DB2}">
+      <thm15:themeFamily xmlns:thm15="http://schemas.microsoft.com/office/thememl/2012/main" name="Office Theme" id="{2E142A2C-CD16-42D6-873A-C26D2A0506FA}" vid="{1BDDFF52-6CD6-40A5-AB3C-68EB2F1E4D0A}"/>
+    </a:ext>
+  </a:extLst>
+</a:theme>
 </file>